--- a/ProgrammingJavaScript/Lectures/Week1_2/Week1&2.pptx
+++ b/ProgrammingJavaScript/Lectures/Week1_2/Week1&2.pptx
@@ -389,7 +389,7 @@
           <a:p>
             <a:fld id="{3341EE12-F28E-4B03-A404-A8FCAE0F6316}" type="datetime1">
               <a:rPr lang="en-US" smtClean="0"/>
-              <a:t>9/12/2023</a:t>
+              <a:t>9/13/2023</a:t>
             </a:fld>
             <a:endParaRPr lang="en-US" dirty="0"/>
           </a:p>
@@ -674,7 +674,7 @@
           <a:p>
             <a:fld id="{B68B8189-0D9C-48A6-9FA3-862227B094CE}" type="datetime1">
               <a:rPr lang="en-US" smtClean="0"/>
-              <a:t>9/12/2023</a:t>
+              <a:t>9/13/2023</a:t>
             </a:fld>
             <a:endParaRPr lang="en-US"/>
           </a:p>
@@ -1038,7 +1038,7 @@
           <a:p>
             <a:fld id="{26ADDCAE-6443-42C3-9C19-F95985500186}" type="datetime1">
               <a:rPr lang="en-US" smtClean="0"/>
-              <a:t>9/12/2023</a:t>
+              <a:t>9/13/2023</a:t>
             </a:fld>
             <a:endParaRPr lang="en-US" dirty="0"/>
           </a:p>
@@ -1300,7 +1300,7 @@
           <a:p>
             <a:fld id="{1962799E-EB8E-4038-8063-81BB57C732D4}" type="datetime1">
               <a:rPr lang="en-US" smtClean="0"/>
-              <a:t>9/12/2023</a:t>
+              <a:t>9/13/2023</a:t>
             </a:fld>
             <a:endParaRPr lang="en-US"/>
           </a:p>
@@ -1730,7 +1730,7 @@
           <a:p>
             <a:fld id="{217A73C3-B243-44D3-809D-EF8FDFBD85D4}" type="datetime1">
               <a:rPr lang="en-US" smtClean="0"/>
-              <a:t>9/12/2023</a:t>
+              <a:t>9/13/2023</a:t>
             </a:fld>
             <a:endParaRPr lang="en-US" dirty="0"/>
           </a:p>
@@ -2061,7 +2061,7 @@
           <a:p>
             <a:fld id="{C9B6D3E3-28E2-4380-A113-67698215C5F8}" type="datetime1">
               <a:rPr lang="en-US" smtClean="0"/>
-              <a:t>9/12/2023</a:t>
+              <a:t>9/13/2023</a:t>
             </a:fld>
             <a:endParaRPr lang="en-US" dirty="0"/>
           </a:p>
@@ -2494,7 +2494,7 @@
           <a:p>
             <a:fld id="{A9EFCB61-04AD-47C9-BF79-2BD8B9CEC07A}" type="datetime1">
               <a:rPr lang="en-US" smtClean="0"/>
-              <a:t>9/12/2023</a:t>
+              <a:t>9/13/2023</a:t>
             </a:fld>
             <a:endParaRPr lang="en-US" dirty="0"/>
           </a:p>
@@ -2646,7 +2646,7 @@
           <a:p>
             <a:fld id="{A4535E0C-D585-492F-8146-7493F4086301}" type="datetime1">
               <a:rPr lang="en-US" smtClean="0"/>
-              <a:t>9/12/2023</a:t>
+              <a:t>9/13/2023</a:t>
             </a:fld>
             <a:endParaRPr lang="en-US"/>
           </a:p>
@@ -2809,7 +2809,7 @@
           <a:p>
             <a:fld id="{8CE48390-48B5-49AB-B019-A7C8FB8C31F6}" type="datetime1">
               <a:rPr lang="en-US" smtClean="0"/>
-              <a:t>9/12/2023</a:t>
+              <a:t>9/13/2023</a:t>
             </a:fld>
             <a:endParaRPr lang="en-US"/>
           </a:p>
@@ -3338,7 +3338,7 @@
           <a:p>
             <a:fld id="{962E767E-8A14-4E70-91B9-2101CBC4D7BD}" type="datetime1">
               <a:rPr lang="en-US" smtClean="0"/>
-              <a:t>9/12/2023</a:t>
+              <a:t>9/13/2023</a:t>
             </a:fld>
             <a:endParaRPr lang="en-US" dirty="0"/>
           </a:p>
@@ -3859,7 +3859,7 @@
           <a:p>
             <a:fld id="{01AF0C4B-5A4A-45CA-ABEC-10F107160D33}" type="datetime1">
               <a:rPr lang="en-US" smtClean="0"/>
-              <a:t>9/12/2023</a:t>
+              <a:t>9/13/2023</a:t>
             </a:fld>
             <a:endParaRPr lang="en-US" dirty="0"/>
           </a:p>
@@ -4409,7 +4409,7 @@
           <a:p>
             <a:fld id="{6989806E-8E94-473C-AEE7-BE6F15F85533}" type="datetime1">
               <a:rPr lang="en-US" smtClean="0"/>
-              <a:t>9/12/2023</a:t>
+              <a:t>9/13/2023</a:t>
             </a:fld>
             <a:endParaRPr lang="en-US" dirty="0"/>
           </a:p>
@@ -7918,7 +7918,21 @@
           <a:p>
             <a:r>
               <a:rPr lang="en-US" dirty="0"/>
-              <a:t> === Strict equal</a:t>
+              <a:t> === Strict equality</a:t>
+            </a:r>
+          </a:p>
+          <a:p>
+            <a:r>
+              <a:rPr lang="en-US" dirty="0"/>
+              <a:t>?: Ternary (Having </a:t>
+            </a:r>
+            <a:r>
+              <a:rPr lang="en-US"/>
+              <a:t>3 operands) </a:t>
+            </a:r>
+            <a:r>
+              <a:rPr lang="en-US" dirty="0"/>
+              <a:t>Operator</a:t>
             </a:r>
           </a:p>
         </p:txBody>
